--- a/data/input/templates/pptx_template.vis_08.test.pptx
+++ b/data/input/templates/pptx_template.vis_08.test.pptx
@@ -243,7 +243,7 @@
           <a:p>
             <a:fld id="{DC6821C8-422F-4CA2-85E1-19A6D027F030}" type="datetimeFigureOut">
               <a:rPr lang="en-US" smtClean="0"/>
-              <a:t>8/18/2026</a:t>
+              <a:t>8/24/2026</a:t>
             </a:fld>
             <a:endParaRPr lang="en-US"/>
           </a:p>
@@ -431,7 +431,7 @@
             <a:fld id="{68D86595-6E20-4226-9E0D-B3822373F9DE}" type="datetimeFigureOut">
               <a:rPr lang="en-US" smtClean="0"/>
               <a:pPr/>
-              <a:t>8/18/2026</a:t>
+              <a:t>8/24/2026</a:t>
             </a:fld>
             <a:endParaRPr lang="en-US"/>
           </a:p>
@@ -11912,42 +11912,6 @@
           <a:xfrm>
             <a:off x="3023" y="1000506"/>
             <a:ext cx="12188977" cy="228600"/>
-          </a:xfrm>
-          <a:prstGeom prst="rect">
-            <a:avLst/>
-          </a:prstGeom>
-        </p:spPr>
-      </p:pic>
-      <p:pic>
-        <p:nvPicPr>
-          <p:cNvPr id="30" name="vis_tbl01">
-            <a:extLst>
-              <a:ext uri="{FF2B5EF4-FFF2-40B4-BE49-F238E27FC236}">
-                <a16:creationId xmlns:a16="http://schemas.microsoft.com/office/drawing/2014/main" id="{75D3306B-29B3-11A1-6BC0-36BFE1C98E72}"/>
-              </a:ext>
-            </a:extLst>
-          </p:cNvPr>
-          <p:cNvPicPr>
-            <a:picLocks noChangeAspect="1"/>
-          </p:cNvPicPr>
-          <p:nvPr/>
-        </p:nvPicPr>
-        <p:blipFill>
-          <a:blip r:embed="rId7">
-            <a:extLst>
-              <a:ext uri="{28A0092B-C50C-407E-A947-70E740481C1C}">
-                <a14:useLocalDpi xmlns:a14="http://schemas.microsoft.com/office/drawing/2010/main" val="0"/>
-              </a:ext>
-            </a:extLst>
-          </a:blip>
-          <a:stretch>
-            <a:fillRect/>
-          </a:stretch>
-        </p:blipFill>
-        <p:spPr>
-          <a:xfrm>
-            <a:off x="9739117" y="1259255"/>
-            <a:ext cx="2395733" cy="1280163"/>
           </a:xfrm>
           <a:prstGeom prst="rect">
             <a:avLst/>
@@ -13079,6 +13043,15 @@
 </file>
 
 <file path=customXml/item2.xml><?xml version="1.0" encoding="utf-8"?>
+<?mso-contentType ?>
+<FormTemplates xmlns="http://schemas.microsoft.com/sharepoint/v3/contenttype/forms">
+  <Display>DocumentLibraryForm</Display>
+  <Edit>DocumentLibraryForm</Edit>
+  <New>DocumentLibraryForm</New>
+</FormTemplates>
+</file>
+
+<file path=customXml/item3.xml><?xml version="1.0" encoding="utf-8"?>
 <p:properties xmlns:p="http://schemas.microsoft.com/office/2006/metadata/properties" xmlns:xsi="http://www.w3.org/2001/XMLSchema-instance" xmlns:pc="http://schemas.microsoft.com/office/infopath/2007/PartnerControls">
   <documentManagement>
     <lcf76f155ced4ddcb4097134ff3c332f xmlns="05b33221-363d-4d44-afe3-1e10ae3da870">
@@ -13089,15 +13062,6 @@
     <_ip_UnifiedCompliancePolicyProperties xmlns="http://schemas.microsoft.com/sharepoint/v3" xsi:nil="true"/>
   </documentManagement>
 </p:properties>
-</file>
-
-<file path=customXml/item3.xml><?xml version="1.0" encoding="utf-8"?>
-<?mso-contentType ?>
-<FormTemplates xmlns="http://schemas.microsoft.com/sharepoint/v3/contenttype/forms">
-  <Display>DocumentLibraryForm</Display>
-  <Edit>DocumentLibraryForm</Edit>
-  <New>DocumentLibraryForm</New>
-</FormTemplates>
 </file>
 
 <file path=customXml/itemProps1.xml><?xml version="1.0" encoding="utf-8"?>
@@ -13121,6 +13085,14 @@
 </file>
 
 <file path=customXml/itemProps2.xml><?xml version="1.0" encoding="utf-8"?>
+<ds:datastoreItem xmlns:ds="http://schemas.openxmlformats.org/officeDocument/2006/customXml" ds:itemID="{2A1CCD50-0B2F-4685-A6F7-F328002129B4}">
+  <ds:schemaRefs>
+    <ds:schemaRef ds:uri="http://schemas.microsoft.com/sharepoint/v3/contenttype/forms"/>
+  </ds:schemaRefs>
+</ds:datastoreItem>
+</file>
+
+<file path=customXml/itemProps3.xml><?xml version="1.0" encoding="utf-8"?>
 <ds:datastoreItem xmlns:ds="http://schemas.openxmlformats.org/officeDocument/2006/customXml" ds:itemID="{49FE8081-5A08-4CEC-98F7-B9DDB3604F60}">
   <ds:schemaRefs>
     <ds:schemaRef ds:uri="05b33221-363d-4d44-afe3-1e10ae3da870"/>
@@ -13138,14 +13110,6 @@
 </ds:datastoreItem>
 </file>
 
-<file path=customXml/itemProps3.xml><?xml version="1.0" encoding="utf-8"?>
-<ds:datastoreItem xmlns:ds="http://schemas.openxmlformats.org/officeDocument/2006/customXml" ds:itemID="{2A1CCD50-0B2F-4685-A6F7-F328002129B4}">
-  <ds:schemaRefs>
-    <ds:schemaRef ds:uri="http://schemas.microsoft.com/sharepoint/v3/contenttype/forms"/>
-  </ds:schemaRefs>
-</ds:datastoreItem>
-</file>
-
 <file path=docMetadata/LabelInfo.xml><?xml version="1.0" encoding="utf-8"?>
 <clbl:labelList xmlns:clbl="http://schemas.microsoft.com/office/2020/mipLabelMetadata">
   <clbl:label id="{5563d9c4-1af6-4d5e-894d-8f5a4315f709}" enabled="1" method="Privileged" siteId="{3667e201-cbdc-48b3-9b42-5d2d3f16e2a9}" removed="0"/>

--- a/data/input/templates/pptx_template.vis_08.test.pptx
+++ b/data/input/templates/pptx_template.vis_08.test.pptx
@@ -243,7 +243,7 @@
           <a:p>
             <a:fld id="{DC6821C8-422F-4CA2-85E1-19A6D027F030}" type="datetimeFigureOut">
               <a:rPr lang="en-US" smtClean="0"/>
-              <a:t>8/24/2026</a:t>
+              <a:t>8/27/2026</a:t>
             </a:fld>
             <a:endParaRPr lang="en-US"/>
           </a:p>
@@ -431,7 +431,7 @@
             <a:fld id="{68D86595-6E20-4226-9E0D-B3822373F9DE}" type="datetimeFigureOut">
               <a:rPr lang="en-US" smtClean="0"/>
               <a:pPr/>
-              <a:t>8/24/2026</a:t>
+              <a:t>8/27/2026</a:t>
             </a:fld>
             <a:endParaRPr lang="en-US"/>
           </a:p>
@@ -11812,7 +11812,7 @@
       </p:sp>
       <p:pic>
         <p:nvPicPr>
-          <p:cNvPr id="13" name="vis_legend">
+          <p:cNvPr id="13" name="vis_08_legend">
             <a:extLst>
               <a:ext uri="{FF2B5EF4-FFF2-40B4-BE49-F238E27FC236}">
                 <a16:creationId xmlns:a16="http://schemas.microsoft.com/office/drawing/2014/main" id="{57D1ED45-B60B-A976-53B5-CA0D01E505C8}"/>
@@ -11838,7 +11838,7 @@
         </p:blipFill>
         <p:spPr>
           <a:xfrm>
-            <a:off x="9728452" y="4832490"/>
+            <a:off x="9785602" y="4832490"/>
             <a:ext cx="2069596" cy="1545339"/>
           </a:xfrm>
           <a:prstGeom prst="rect">
@@ -11848,7 +11848,7 @@
       </p:pic>
       <p:pic>
         <p:nvPicPr>
-          <p:cNvPr id="24" name="vis_image">
+          <p:cNvPr id="24" name="vis_08_image">
             <a:extLst>
               <a:ext uri="{FF2B5EF4-FFF2-40B4-BE49-F238E27FC236}">
                 <a16:creationId xmlns:a16="http://schemas.microsoft.com/office/drawing/2014/main" id="{9823079B-1FE0-72AA-384F-D64AD086BB66}"/>
@@ -11884,7 +11884,7 @@
       </p:pic>
       <p:pic>
         <p:nvPicPr>
-          <p:cNvPr id="28" name="vis_title">
+          <p:cNvPr id="28" name="vis_08_title">
             <a:extLst>
               <a:ext uri="{FF2B5EF4-FFF2-40B4-BE49-F238E27FC236}">
                 <a16:creationId xmlns:a16="http://schemas.microsoft.com/office/drawing/2014/main" id="{D1087F02-0043-F7F0-5CAD-26D416989F96}"/>
@@ -11959,6 +11959,42 @@
           </a:p>
         </p:txBody>
       </p:sp>
+      <p:pic>
+        <p:nvPicPr>
+          <p:cNvPr id="3" name="vis_08_projection_table">
+            <a:extLst>
+              <a:ext uri="{FF2B5EF4-FFF2-40B4-BE49-F238E27FC236}">
+                <a16:creationId xmlns:a16="http://schemas.microsoft.com/office/drawing/2014/main" id="{DE6DD08D-454A-D3AA-AAD8-C3540DED63C9}"/>
+              </a:ext>
+            </a:extLst>
+          </p:cNvPr>
+          <p:cNvPicPr>
+            <a:picLocks noChangeAspect="1"/>
+          </p:cNvPicPr>
+          <p:nvPr/>
+        </p:nvPicPr>
+        <p:blipFill>
+          <a:blip r:embed="rId7">
+            <a:extLst>
+              <a:ext uri="{28A0092B-C50C-407E-A947-70E740481C1C}">
+                <a14:useLocalDpi xmlns:a14="http://schemas.microsoft.com/office/drawing/2010/main" val="0"/>
+              </a:ext>
+            </a:extLst>
+          </a:blip>
+          <a:stretch>
+            <a:fillRect/>
+          </a:stretch>
+        </p:blipFill>
+        <p:spPr>
+          <a:xfrm>
+            <a:off x="9785602" y="1252645"/>
+            <a:ext cx="2395733" cy="1280163"/>
+          </a:xfrm>
+          <a:prstGeom prst="rect">
+            <a:avLst/>
+          </a:prstGeom>
+        </p:spPr>
+      </p:pic>
     </p:spTree>
     <p:custDataLst>
       <p:tags r:id="rId1"/>
@@ -13043,15 +13079,6 @@
 </file>
 
 <file path=customXml/item2.xml><?xml version="1.0" encoding="utf-8"?>
-<?mso-contentType ?>
-<FormTemplates xmlns="http://schemas.microsoft.com/sharepoint/v3/contenttype/forms">
-  <Display>DocumentLibraryForm</Display>
-  <Edit>DocumentLibraryForm</Edit>
-  <New>DocumentLibraryForm</New>
-</FormTemplates>
-</file>
-
-<file path=customXml/item3.xml><?xml version="1.0" encoding="utf-8"?>
 <p:properties xmlns:p="http://schemas.microsoft.com/office/2006/metadata/properties" xmlns:xsi="http://www.w3.org/2001/XMLSchema-instance" xmlns:pc="http://schemas.microsoft.com/office/infopath/2007/PartnerControls">
   <documentManagement>
     <lcf76f155ced4ddcb4097134ff3c332f xmlns="05b33221-363d-4d44-afe3-1e10ae3da870">
@@ -13062,6 +13089,15 @@
     <_ip_UnifiedCompliancePolicyProperties xmlns="http://schemas.microsoft.com/sharepoint/v3" xsi:nil="true"/>
   </documentManagement>
 </p:properties>
+</file>
+
+<file path=customXml/item3.xml><?xml version="1.0" encoding="utf-8"?>
+<?mso-contentType ?>
+<FormTemplates xmlns="http://schemas.microsoft.com/sharepoint/v3/contenttype/forms">
+  <Display>DocumentLibraryForm</Display>
+  <Edit>DocumentLibraryForm</Edit>
+  <New>DocumentLibraryForm</New>
+</FormTemplates>
 </file>
 
 <file path=customXml/itemProps1.xml><?xml version="1.0" encoding="utf-8"?>
@@ -13085,14 +13121,6 @@
 </file>
 
 <file path=customXml/itemProps2.xml><?xml version="1.0" encoding="utf-8"?>
-<ds:datastoreItem xmlns:ds="http://schemas.openxmlformats.org/officeDocument/2006/customXml" ds:itemID="{2A1CCD50-0B2F-4685-A6F7-F328002129B4}">
-  <ds:schemaRefs>
-    <ds:schemaRef ds:uri="http://schemas.microsoft.com/sharepoint/v3/contenttype/forms"/>
-  </ds:schemaRefs>
-</ds:datastoreItem>
-</file>
-
-<file path=customXml/itemProps3.xml><?xml version="1.0" encoding="utf-8"?>
 <ds:datastoreItem xmlns:ds="http://schemas.openxmlformats.org/officeDocument/2006/customXml" ds:itemID="{49FE8081-5A08-4CEC-98F7-B9DDB3604F60}">
   <ds:schemaRefs>
     <ds:schemaRef ds:uri="05b33221-363d-4d44-afe3-1e10ae3da870"/>
@@ -13110,6 +13138,14 @@
 </ds:datastoreItem>
 </file>
 
+<file path=customXml/itemProps3.xml><?xml version="1.0" encoding="utf-8"?>
+<ds:datastoreItem xmlns:ds="http://schemas.openxmlformats.org/officeDocument/2006/customXml" ds:itemID="{2A1CCD50-0B2F-4685-A6F7-F328002129B4}">
+  <ds:schemaRefs>
+    <ds:schemaRef ds:uri="http://schemas.microsoft.com/sharepoint/v3/contenttype/forms"/>
+  </ds:schemaRefs>
+</ds:datastoreItem>
+</file>
+
 <file path=docMetadata/LabelInfo.xml><?xml version="1.0" encoding="utf-8"?>
 <clbl:labelList xmlns:clbl="http://schemas.microsoft.com/office/2020/mipLabelMetadata">
   <clbl:label id="{5563d9c4-1af6-4d5e-894d-8f5a4315f709}" enabled="1" method="Privileged" siteId="{3667e201-cbdc-48b3-9b42-5d2d3f16e2a9}" removed="0"/>

--- a/data/input/templates/pptx_template.vis_08.test.pptx
+++ b/data/input/templates/pptx_template.vis_08.test.pptx
@@ -243,7 +243,7 @@
           <a:p>
             <a:fld id="{DC6821C8-422F-4CA2-85E1-19A6D027F030}" type="datetimeFigureOut">
               <a:rPr lang="en-US" smtClean="0"/>
-              <a:t>8/27/2026</a:t>
+              <a:t>8/28/2026</a:t>
             </a:fld>
             <a:endParaRPr lang="en-US"/>
           </a:p>
@@ -431,7 +431,7 @@
             <a:fld id="{68D86595-6E20-4226-9E0D-B3822373F9DE}" type="datetimeFigureOut">
               <a:rPr lang="en-US" smtClean="0"/>
               <a:pPr/>
-              <a:t>8/27/2026</a:t>
+              <a:t>8/28/2026</a:t>
             </a:fld>
             <a:endParaRPr lang="en-US"/>
           </a:p>
@@ -775,7 +775,7 @@
           <a:bodyPr/>
           <a:lstStyle/>
           <a:p>
-            <a:endParaRPr lang="en-US"/>
+            <a:endParaRPr lang="en-US" dirty="0"/>
           </a:p>
         </p:txBody>
       </p:sp>
@@ -11856,7 +11856,7 @@
             </a:extLst>
           </p:cNvPr>
           <p:cNvPicPr>
-            <a:picLocks noChangeAspect="1"/>
+            <a:picLocks/>
           </p:cNvPicPr>
           <p:nvPr/>
         </p:nvPicPr>
@@ -11874,8 +11874,8 @@
         </p:blipFill>
         <p:spPr>
           <a:xfrm>
-            <a:off x="0" y="1207008"/>
-            <a:ext cx="9829820" cy="5651003"/>
+            <a:off x="0" y="1311749"/>
+            <a:ext cx="9692640" cy="5486400"/>
           </a:xfrm>
           <a:prstGeom prst="rect">
             <a:avLst/>
@@ -11892,7 +11892,7 @@
             </a:extLst>
           </p:cNvPr>
           <p:cNvPicPr>
-            <a:picLocks noChangeAspect="1"/>
+            <a:picLocks/>
           </p:cNvPicPr>
           <p:nvPr/>
         </p:nvPicPr>
@@ -11910,8 +11910,8 @@
         </p:blipFill>
         <p:spPr>
           <a:xfrm>
-            <a:off x="3023" y="1000506"/>
-            <a:ext cx="12188977" cy="228600"/>
+            <a:off x="3022" y="1000506"/>
+            <a:ext cx="12188952" cy="274320"/>
           </a:xfrm>
           <a:prstGeom prst="rect">
             <a:avLst/>
@@ -11987,7 +11987,7 @@
         </p:blipFill>
         <p:spPr>
           <a:xfrm>
-            <a:off x="9785602" y="1252645"/>
+            <a:off x="9693527" y="1349365"/>
             <a:ext cx="2395733" cy="1280163"/>
           </a:xfrm>
           <a:prstGeom prst="rect">
@@ -12801,6 +12801,15 @@
 </file>
 
 <file path=customXml/item1.xml><?xml version="1.0" encoding="utf-8"?>
+<?mso-contentType ?>
+<FormTemplates xmlns="http://schemas.microsoft.com/sharepoint/v3/contenttype/forms">
+  <Display>DocumentLibraryForm</Display>
+  <Edit>DocumentLibraryForm</Edit>
+  <New>DocumentLibraryForm</New>
+</FormTemplates>
+</file>
+
+<file path=customXml/item2.xml><?xml version="1.0" encoding="utf-8"?>
 <ct:contentTypeSchema xmlns:ct="http://schemas.microsoft.com/office/2006/metadata/contentType" xmlns:ma="http://schemas.microsoft.com/office/2006/metadata/properties/metaAttributes" ct:_="" ma:_="" ma:contentTypeName="Document" ma:contentTypeID="0x0101007C05FC438C08F64C9132B6FBC0D96311" ma:contentTypeVersion="24" ma:contentTypeDescription="Create a new document." ma:contentTypeScope="" ma:versionID="22d494908fdf90bc6988f706955fa32f">
   <xsd:schema xmlns:xsd="http://www.w3.org/2001/XMLSchema" xmlns:xs="http://www.w3.org/2001/XMLSchema" xmlns:p="http://schemas.microsoft.com/office/2006/metadata/properties" xmlns:ns1="http://schemas.microsoft.com/sharepoint/v3" xmlns:ns2="05b33221-363d-4d44-afe3-1e10ae3da870" xmlns:ns3="94c2ac1f-262f-4a65-a5e7-6f8add8435c5" targetNamespace="http://schemas.microsoft.com/office/2006/metadata/properties" ma:root="true" ma:fieldsID="30436de7bd3c53d79405fd25fdac0caa" ns1:_="" ns2:_="" ns3:_="">
     <xsd:import namespace="http://schemas.microsoft.com/sharepoint/v3"/>
@@ -13078,7 +13087,7 @@
 </ct:contentTypeSchema>
 </file>
 
-<file path=customXml/item2.xml><?xml version="1.0" encoding="utf-8"?>
+<file path=customXml/item3.xml><?xml version="1.0" encoding="utf-8"?>
 <p:properties xmlns:p="http://schemas.microsoft.com/office/2006/metadata/properties" xmlns:xsi="http://www.w3.org/2001/XMLSchema-instance" xmlns:pc="http://schemas.microsoft.com/office/infopath/2007/PartnerControls">
   <documentManagement>
     <lcf76f155ced4ddcb4097134ff3c332f xmlns="05b33221-363d-4d44-afe3-1e10ae3da870">
@@ -13091,16 +13100,15 @@
 </p:properties>
 </file>
 
-<file path=customXml/item3.xml><?xml version="1.0" encoding="utf-8"?>
-<?mso-contentType ?>
-<FormTemplates xmlns="http://schemas.microsoft.com/sharepoint/v3/contenttype/forms">
-  <Display>DocumentLibraryForm</Display>
-  <Edit>DocumentLibraryForm</Edit>
-  <New>DocumentLibraryForm</New>
-</FormTemplates>
+<file path=customXml/itemProps1.xml><?xml version="1.0" encoding="utf-8"?>
+<ds:datastoreItem xmlns:ds="http://schemas.openxmlformats.org/officeDocument/2006/customXml" ds:itemID="{2A1CCD50-0B2F-4685-A6F7-F328002129B4}">
+  <ds:schemaRefs>
+    <ds:schemaRef ds:uri="http://schemas.microsoft.com/sharepoint/v3/contenttype/forms"/>
+  </ds:schemaRefs>
+</ds:datastoreItem>
 </file>
 
-<file path=customXml/itemProps1.xml><?xml version="1.0" encoding="utf-8"?>
+<file path=customXml/itemProps2.xml><?xml version="1.0" encoding="utf-8"?>
 <ds:datastoreItem xmlns:ds="http://schemas.openxmlformats.org/officeDocument/2006/customXml" ds:itemID="{7F701559-4F1E-4B9D-BE8F-E04DDEF875C7}">
   <ds:schemaRefs>
     <ds:schemaRef ds:uri="05b33221-363d-4d44-afe3-1e10ae3da870"/>
@@ -13120,7 +13128,7 @@
 </ds:datastoreItem>
 </file>
 
-<file path=customXml/itemProps2.xml><?xml version="1.0" encoding="utf-8"?>
+<file path=customXml/itemProps3.xml><?xml version="1.0" encoding="utf-8"?>
 <ds:datastoreItem xmlns:ds="http://schemas.openxmlformats.org/officeDocument/2006/customXml" ds:itemID="{49FE8081-5A08-4CEC-98F7-B9DDB3604F60}">
   <ds:schemaRefs>
     <ds:schemaRef ds:uri="05b33221-363d-4d44-afe3-1e10ae3da870"/>
@@ -13138,14 +13146,6 @@
 </ds:datastoreItem>
 </file>
 
-<file path=customXml/itemProps3.xml><?xml version="1.0" encoding="utf-8"?>
-<ds:datastoreItem xmlns:ds="http://schemas.openxmlformats.org/officeDocument/2006/customXml" ds:itemID="{2A1CCD50-0B2F-4685-A6F7-F328002129B4}">
-  <ds:schemaRefs>
-    <ds:schemaRef ds:uri="http://schemas.microsoft.com/sharepoint/v3/contenttype/forms"/>
-  </ds:schemaRefs>
-</ds:datastoreItem>
-</file>
-
 <file path=docMetadata/LabelInfo.xml><?xml version="1.0" encoding="utf-8"?>
 <clbl:labelList xmlns:clbl="http://schemas.microsoft.com/office/2020/mipLabelMetadata">
   <clbl:label id="{5563d9c4-1af6-4d5e-894d-8f5a4315f709}" enabled="1" method="Privileged" siteId="{3667e201-cbdc-48b3-9b42-5d2d3f16e2a9}" removed="0"/>

--- a/data/input/templates/pptx_template.vis_08.test.pptx
+++ b/data/input/templates/pptx_template.vis_08.test.pptx
@@ -243,7 +243,7 @@
           <a:p>
             <a:fld id="{DC6821C8-422F-4CA2-85E1-19A6D027F030}" type="datetimeFigureOut">
               <a:rPr lang="en-US" smtClean="0"/>
-              <a:t>8/28/2026</a:t>
+              <a:t>9/3/2026</a:t>
             </a:fld>
             <a:endParaRPr lang="en-US"/>
           </a:p>
@@ -431,7 +431,7 @@
             <a:fld id="{68D86595-6E20-4226-9E0D-B3822373F9DE}" type="datetimeFigureOut">
               <a:rPr lang="en-US" smtClean="0"/>
               <a:pPr/>
-              <a:t>8/28/2026</a:t>
+              <a:t>9/3/2026</a:t>
             </a:fld>
             <a:endParaRPr lang="en-US"/>
           </a:p>
@@ -11812,15 +11812,15 @@
       </p:sp>
       <p:pic>
         <p:nvPicPr>
-          <p:cNvPr id="13" name="vis_08_legend">
+          <p:cNvPr id="24" name="vis_08_image">
             <a:extLst>
               <a:ext uri="{FF2B5EF4-FFF2-40B4-BE49-F238E27FC236}">
-                <a16:creationId xmlns:a16="http://schemas.microsoft.com/office/drawing/2014/main" id="{57D1ED45-B60B-A976-53B5-CA0D01E505C8}"/>
+                <a16:creationId xmlns:a16="http://schemas.microsoft.com/office/drawing/2014/main" id="{9823079B-1FE0-72AA-384F-D64AD086BB66}"/>
               </a:ext>
             </a:extLst>
           </p:cNvPr>
           <p:cNvPicPr>
-            <a:picLocks noChangeAspect="1"/>
+            <a:picLocks/>
           </p:cNvPicPr>
           <p:nvPr/>
         </p:nvPicPr>
@@ -11838,8 +11838,8 @@
         </p:blipFill>
         <p:spPr>
           <a:xfrm>
-            <a:off x="9785602" y="4832490"/>
-            <a:ext cx="2069596" cy="1545339"/>
+            <a:off x="0" y="1311749"/>
+            <a:ext cx="9692640" cy="5486400"/>
           </a:xfrm>
           <a:prstGeom prst="rect">
             <a:avLst/>
@@ -11848,10 +11848,10 @@
       </p:pic>
       <p:pic>
         <p:nvPicPr>
-          <p:cNvPr id="24" name="vis_08_image">
+          <p:cNvPr id="28" name="vis_08_title">
             <a:extLst>
               <a:ext uri="{FF2B5EF4-FFF2-40B4-BE49-F238E27FC236}">
-                <a16:creationId xmlns:a16="http://schemas.microsoft.com/office/drawing/2014/main" id="{9823079B-1FE0-72AA-384F-D64AD086BB66}"/>
+                <a16:creationId xmlns:a16="http://schemas.microsoft.com/office/drawing/2014/main" id="{D1087F02-0043-F7F0-5CAD-26D416989F96}"/>
               </a:ext>
             </a:extLst>
           </p:cNvPr>
@@ -11874,25 +11874,66 @@
         </p:blipFill>
         <p:spPr>
           <a:xfrm>
-            <a:off x="0" y="1311749"/>
-            <a:ext cx="9692640" cy="5486400"/>
+            <a:off x="3022" y="1000506"/>
+            <a:ext cx="12188952" cy="274320"/>
           </a:xfrm>
           <a:prstGeom prst="rect">
             <a:avLst/>
           </a:prstGeom>
         </p:spPr>
       </p:pic>
+      <p:sp>
+        <p:nvSpPr>
+          <p:cNvPr id="32" name="txt_cohort_id">
+            <a:extLst>
+              <a:ext uri="{FF2B5EF4-FFF2-40B4-BE49-F238E27FC236}">
+                <a16:creationId xmlns:a16="http://schemas.microsoft.com/office/drawing/2014/main" id="{18C7F24C-273F-50FB-67C6-53DA21D88874}"/>
+              </a:ext>
+            </a:extLst>
+          </p:cNvPr>
+          <p:cNvSpPr txBox="1"/>
+          <p:nvPr/>
+        </p:nvSpPr>
+        <p:spPr>
+          <a:xfrm>
+            <a:off x="-1" y="6567555"/>
+            <a:ext cx="9739117" cy="276999"/>
+          </a:xfrm>
+          <a:prstGeom prst="rect">
+            <a:avLst/>
+          </a:prstGeom>
+          <a:noFill/>
+        </p:spPr>
+        <p:txBody>
+          <a:bodyPr wrap="square" rtlCol="0">
+            <a:spAutoFit/>
+          </a:bodyPr>
+          <a:lstStyle/>
+          <a:p>
+            <a:r>
+              <a:rPr lang="en-US" sz="1200" dirty="0">
+                <a:solidFill>
+                  <a:schemeClr val="bg1">
+                    <a:lumMod val="65000"/>
+                  </a:schemeClr>
+                </a:solidFill>
+              </a:rPr>
+              <a:t>.</a:t>
+            </a:r>
+          </a:p>
+        </p:txBody>
+      </p:sp>
       <p:pic>
         <p:nvPicPr>
-          <p:cNvPr id="28" name="vis_08_title">
+          <p:cNvPr id="5" name="vis_08_projection_table">
             <a:extLst>
               <a:ext uri="{FF2B5EF4-FFF2-40B4-BE49-F238E27FC236}">
-                <a16:creationId xmlns:a16="http://schemas.microsoft.com/office/drawing/2014/main" id="{D1087F02-0043-F7F0-5CAD-26D416989F96}"/>
+                <a16:creationId xmlns:a16="http://schemas.microsoft.com/office/drawing/2014/main" id="{15D40CCA-2E89-D65A-A9F0-D15C7D884084}"/>
               </a:ext>
             </a:extLst>
           </p:cNvPr>
           <p:cNvPicPr>
-            <a:picLocks/>
+            <a:picLocks noChangeAspect="1"/>
           </p:cNvPicPr>
           <p:nvPr/>
         </p:nvPicPr>
@@ -11910,61 +11951,20 @@
         </p:blipFill>
         <p:spPr>
           <a:xfrm>
-            <a:off x="3022" y="1000506"/>
-            <a:ext cx="12188952" cy="274320"/>
+            <a:off x="9692640" y="1298063"/>
+            <a:ext cx="2401829" cy="1969012"/>
           </a:xfrm>
           <a:prstGeom prst="rect">
             <a:avLst/>
           </a:prstGeom>
         </p:spPr>
       </p:pic>
-      <p:sp>
-        <p:nvSpPr>
-          <p:cNvPr id="32" name="txt_cohort_id">
+      <p:pic>
+        <p:nvPicPr>
+          <p:cNvPr id="7" name="vis_08_peak_projection_table">
             <a:extLst>
               <a:ext uri="{FF2B5EF4-FFF2-40B4-BE49-F238E27FC236}">
-                <a16:creationId xmlns:a16="http://schemas.microsoft.com/office/drawing/2014/main" id="{18C7F24C-273F-50FB-67C6-53DA21D88874}"/>
-              </a:ext>
-            </a:extLst>
-          </p:cNvPr>
-          <p:cNvSpPr txBox="1"/>
-          <p:nvPr/>
-        </p:nvSpPr>
-        <p:spPr>
-          <a:xfrm>
-            <a:off x="-1" y="6567555"/>
-            <a:ext cx="9739117" cy="276999"/>
-          </a:xfrm>
-          <a:prstGeom prst="rect">
-            <a:avLst/>
-          </a:prstGeom>
-          <a:noFill/>
-        </p:spPr>
-        <p:txBody>
-          <a:bodyPr wrap="square" rtlCol="0">
-            <a:spAutoFit/>
-          </a:bodyPr>
-          <a:lstStyle/>
-          <a:p>
-            <a:r>
-              <a:rPr lang="en-US" sz="1200" dirty="0">
-                <a:solidFill>
-                  <a:schemeClr val="bg1">
-                    <a:lumMod val="65000"/>
-                  </a:schemeClr>
-                </a:solidFill>
-              </a:rPr>
-              <a:t>.</a:t>
-            </a:r>
-          </a:p>
-        </p:txBody>
-      </p:sp>
-      <p:pic>
-        <p:nvPicPr>
-          <p:cNvPr id="3" name="vis_08_projection_table">
-            <a:extLst>
-              <a:ext uri="{FF2B5EF4-FFF2-40B4-BE49-F238E27FC236}">
-                <a16:creationId xmlns:a16="http://schemas.microsoft.com/office/drawing/2014/main" id="{DE6DD08D-454A-D3AA-AAD8-C3540DED63C9}"/>
+                <a16:creationId xmlns:a16="http://schemas.microsoft.com/office/drawing/2014/main" id="{201D0681-4280-C19D-C167-B45017A0B063}"/>
               </a:ext>
             </a:extLst>
           </p:cNvPr>
@@ -11974,7 +11974,7 @@
           <p:nvPr/>
         </p:nvPicPr>
         <p:blipFill>
-          <a:blip r:embed="rId7">
+          <a:blip r:embed="rId7" cstate="print">
             <a:extLst>
               <a:ext uri="{28A0092B-C50C-407E-A947-70E740481C1C}">
                 <a14:useLocalDpi xmlns:a14="http://schemas.microsoft.com/office/drawing/2010/main" val="0"/>
@@ -11987,8 +11987,80 @@
         </p:blipFill>
         <p:spPr>
           <a:xfrm>
-            <a:off x="9693527" y="1349365"/>
-            <a:ext cx="2395733" cy="1280163"/>
+            <a:off x="9692640" y="3228005"/>
+            <a:ext cx="2401829" cy="1969012"/>
+          </a:xfrm>
+          <a:prstGeom prst="rect">
+            <a:avLst/>
+          </a:prstGeom>
+        </p:spPr>
+      </p:pic>
+      <p:pic>
+        <p:nvPicPr>
+          <p:cNvPr id="10" name="vis_08_legend">
+            <a:extLst>
+              <a:ext uri="{FF2B5EF4-FFF2-40B4-BE49-F238E27FC236}">
+                <a16:creationId xmlns:a16="http://schemas.microsoft.com/office/drawing/2014/main" id="{7D8CD4B0-8C1A-85B2-3727-CE732254E244}"/>
+              </a:ext>
+            </a:extLst>
+          </p:cNvPr>
+          <p:cNvPicPr>
+            <a:picLocks noChangeAspect="1"/>
+          </p:cNvPicPr>
+          <p:nvPr/>
+        </p:nvPicPr>
+        <p:blipFill>
+          <a:blip r:embed="rId8" cstate="print">
+            <a:extLst>
+              <a:ext uri="{28A0092B-C50C-407E-A947-70E740481C1C}">
+                <a14:useLocalDpi xmlns:a14="http://schemas.microsoft.com/office/drawing/2010/main" val="0"/>
+              </a:ext>
+            </a:extLst>
+          </a:blip>
+          <a:stretch>
+            <a:fillRect/>
+          </a:stretch>
+        </p:blipFill>
+        <p:spPr>
+          <a:xfrm>
+            <a:off x="9739116" y="5304222"/>
+            <a:ext cx="2069596" cy="1164338"/>
+          </a:xfrm>
+          <a:prstGeom prst="rect">
+            <a:avLst/>
+          </a:prstGeom>
+        </p:spPr>
+      </p:pic>
+      <p:pic>
+        <p:nvPicPr>
+          <p:cNvPr id="17" name="vis_08_peak_point">
+            <a:extLst>
+              <a:ext uri="{FF2B5EF4-FFF2-40B4-BE49-F238E27FC236}">
+                <a16:creationId xmlns:a16="http://schemas.microsoft.com/office/drawing/2014/main" id="{6CE70D2D-B996-F383-F0FB-986FFE2391E8}"/>
+              </a:ext>
+            </a:extLst>
+          </p:cNvPr>
+          <p:cNvPicPr>
+            <a:picLocks noChangeAspect="1"/>
+          </p:cNvPicPr>
+          <p:nvPr/>
+        </p:nvPicPr>
+        <p:blipFill>
+          <a:blip r:embed="rId9" cstate="print">
+            <a:extLst>
+              <a:ext uri="{28A0092B-C50C-407E-A947-70E740481C1C}">
+                <a14:useLocalDpi xmlns:a14="http://schemas.microsoft.com/office/drawing/2010/main" val="0"/>
+              </a:ext>
+            </a:extLst>
+          </a:blip>
+          <a:stretch>
+            <a:fillRect/>
+          </a:stretch>
+        </p:blipFill>
+        <p:spPr>
+          <a:xfrm>
+            <a:off x="609600" y="1527435"/>
+            <a:ext cx="1371603" cy="630937"/>
           </a:xfrm>
           <a:prstGeom prst="rect">
             <a:avLst/>
@@ -12810,6 +12882,19 @@
 </file>
 
 <file path=customXml/item2.xml><?xml version="1.0" encoding="utf-8"?>
+<p:properties xmlns:p="http://schemas.microsoft.com/office/2006/metadata/properties" xmlns:xsi="http://www.w3.org/2001/XMLSchema-instance" xmlns:pc="http://schemas.microsoft.com/office/infopath/2007/PartnerControls">
+  <documentManagement>
+    <lcf76f155ced4ddcb4097134ff3c332f xmlns="05b33221-363d-4d44-afe3-1e10ae3da870">
+      <Terms xmlns="http://schemas.microsoft.com/office/infopath/2007/PartnerControls"/>
+    </lcf76f155ced4ddcb4097134ff3c332f>
+    <TaxCatchAll xmlns="94c2ac1f-262f-4a65-a5e7-6f8add8435c5" xsi:nil="true"/>
+    <_ip_UnifiedCompliancePolicyUIAction xmlns="http://schemas.microsoft.com/sharepoint/v3" xsi:nil="true"/>
+    <_ip_UnifiedCompliancePolicyProperties xmlns="http://schemas.microsoft.com/sharepoint/v3" xsi:nil="true"/>
+  </documentManagement>
+</p:properties>
+</file>
+
+<file path=customXml/item3.xml><?xml version="1.0" encoding="utf-8"?>
 <ct:contentTypeSchema xmlns:ct="http://schemas.microsoft.com/office/2006/metadata/contentType" xmlns:ma="http://schemas.microsoft.com/office/2006/metadata/properties/metaAttributes" ct:_="" ma:_="" ma:contentTypeName="Document" ma:contentTypeID="0x0101007C05FC438C08F64C9132B6FBC0D96311" ma:contentTypeVersion="24" ma:contentTypeDescription="Create a new document." ma:contentTypeScope="" ma:versionID="22d494908fdf90bc6988f706955fa32f">
   <xsd:schema xmlns:xsd="http://www.w3.org/2001/XMLSchema" xmlns:xs="http://www.w3.org/2001/XMLSchema" xmlns:p="http://schemas.microsoft.com/office/2006/metadata/properties" xmlns:ns1="http://schemas.microsoft.com/sharepoint/v3" xmlns:ns2="05b33221-363d-4d44-afe3-1e10ae3da870" xmlns:ns3="94c2ac1f-262f-4a65-a5e7-6f8add8435c5" targetNamespace="http://schemas.microsoft.com/office/2006/metadata/properties" ma:root="true" ma:fieldsID="30436de7bd3c53d79405fd25fdac0caa" ns1:_="" ns2:_="" ns3:_="">
     <xsd:import namespace="http://schemas.microsoft.com/sharepoint/v3"/>
@@ -13087,19 +13172,6 @@
 </ct:contentTypeSchema>
 </file>
 
-<file path=customXml/item3.xml><?xml version="1.0" encoding="utf-8"?>
-<p:properties xmlns:p="http://schemas.microsoft.com/office/2006/metadata/properties" xmlns:xsi="http://www.w3.org/2001/XMLSchema-instance" xmlns:pc="http://schemas.microsoft.com/office/infopath/2007/PartnerControls">
-  <documentManagement>
-    <lcf76f155ced4ddcb4097134ff3c332f xmlns="05b33221-363d-4d44-afe3-1e10ae3da870">
-      <Terms xmlns="http://schemas.microsoft.com/office/infopath/2007/PartnerControls"/>
-    </lcf76f155ced4ddcb4097134ff3c332f>
-    <TaxCatchAll xmlns="94c2ac1f-262f-4a65-a5e7-6f8add8435c5" xsi:nil="true"/>
-    <_ip_UnifiedCompliancePolicyUIAction xmlns="http://schemas.microsoft.com/sharepoint/v3" xsi:nil="true"/>
-    <_ip_UnifiedCompliancePolicyProperties xmlns="http://schemas.microsoft.com/sharepoint/v3" xsi:nil="true"/>
-  </documentManagement>
-</p:properties>
-</file>
-
 <file path=customXml/itemProps1.xml><?xml version="1.0" encoding="utf-8"?>
 <ds:datastoreItem xmlns:ds="http://schemas.openxmlformats.org/officeDocument/2006/customXml" ds:itemID="{2A1CCD50-0B2F-4685-A6F7-F328002129B4}">
   <ds:schemaRefs>
@@ -13109,6 +13181,24 @@
 </file>
 
 <file path=customXml/itemProps2.xml><?xml version="1.0" encoding="utf-8"?>
+<ds:datastoreItem xmlns:ds="http://schemas.openxmlformats.org/officeDocument/2006/customXml" ds:itemID="{49FE8081-5A08-4CEC-98F7-B9DDB3604F60}">
+  <ds:schemaRefs>
+    <ds:schemaRef ds:uri="05b33221-363d-4d44-afe3-1e10ae3da870"/>
+    <ds:schemaRef ds:uri="94c2ac1f-262f-4a65-a5e7-6f8add8435c5"/>
+    <ds:schemaRef ds:uri="http://purl.org/dc/dcmitype/"/>
+    <ds:schemaRef ds:uri="http://purl.org/dc/elements/1.1/"/>
+    <ds:schemaRef ds:uri="http://purl.org/dc/terms/"/>
+    <ds:schemaRef ds:uri="http://schemas.microsoft.com/office/2006/documentManagement/types"/>
+    <ds:schemaRef ds:uri="http://schemas.microsoft.com/office/2006/metadata/properties"/>
+    <ds:schemaRef ds:uri="http://schemas.microsoft.com/office/infopath/2007/PartnerControls"/>
+    <ds:schemaRef ds:uri="http://schemas.microsoft.com/sharepoint/v3"/>
+    <ds:schemaRef ds:uri="http://schemas.openxmlformats.org/package/2006/metadata/core-properties"/>
+    <ds:schemaRef ds:uri="http://www.w3.org/XML/1998/namespace"/>
+  </ds:schemaRefs>
+</ds:datastoreItem>
+</file>
+
+<file path=customXml/itemProps3.xml><?xml version="1.0" encoding="utf-8"?>
 <ds:datastoreItem xmlns:ds="http://schemas.openxmlformats.org/officeDocument/2006/customXml" ds:itemID="{7F701559-4F1E-4B9D-BE8F-E04DDEF875C7}">
   <ds:schemaRefs>
     <ds:schemaRef ds:uri="05b33221-363d-4d44-afe3-1e10ae3da870"/>
@@ -13128,24 +13218,6 @@
 </ds:datastoreItem>
 </file>
 
-<file path=customXml/itemProps3.xml><?xml version="1.0" encoding="utf-8"?>
-<ds:datastoreItem xmlns:ds="http://schemas.openxmlformats.org/officeDocument/2006/customXml" ds:itemID="{49FE8081-5A08-4CEC-98F7-B9DDB3604F60}">
-  <ds:schemaRefs>
-    <ds:schemaRef ds:uri="05b33221-363d-4d44-afe3-1e10ae3da870"/>
-    <ds:schemaRef ds:uri="94c2ac1f-262f-4a65-a5e7-6f8add8435c5"/>
-    <ds:schemaRef ds:uri="http://purl.org/dc/dcmitype/"/>
-    <ds:schemaRef ds:uri="http://purl.org/dc/elements/1.1/"/>
-    <ds:schemaRef ds:uri="http://purl.org/dc/terms/"/>
-    <ds:schemaRef ds:uri="http://schemas.microsoft.com/office/2006/documentManagement/types"/>
-    <ds:schemaRef ds:uri="http://schemas.microsoft.com/office/2006/metadata/properties"/>
-    <ds:schemaRef ds:uri="http://schemas.microsoft.com/office/infopath/2007/PartnerControls"/>
-    <ds:schemaRef ds:uri="http://schemas.microsoft.com/sharepoint/v3"/>
-    <ds:schemaRef ds:uri="http://schemas.openxmlformats.org/package/2006/metadata/core-properties"/>
-    <ds:schemaRef ds:uri="http://www.w3.org/XML/1998/namespace"/>
-  </ds:schemaRefs>
-</ds:datastoreItem>
-</file>
-
 <file path=docMetadata/LabelInfo.xml><?xml version="1.0" encoding="utf-8"?>
 <clbl:labelList xmlns:clbl="http://schemas.microsoft.com/office/2020/mipLabelMetadata">
   <clbl:label id="{5563d9c4-1af6-4d5e-894d-8f5a4315f709}" enabled="1" method="Privileged" siteId="{3667e201-cbdc-48b3-9b42-5d2d3f16e2a9}" removed="0"/>
